--- a/企画書.pptx
+++ b/企画書.pptx
@@ -6,9 +6,9 @@
   </p:sldMasterIdLst>
   <p:sldIdLst>
     <p:sldId id="256" r:id="rId2"/>
-    <p:sldId id="260" r:id="rId3"/>
-    <p:sldId id="258" r:id="rId4"/>
-    <p:sldId id="259" r:id="rId5"/>
+    <p:sldId id="262" r:id="rId3"/>
+    <p:sldId id="260" r:id="rId4"/>
+    <p:sldId id="258" r:id="rId5"/>
   </p:sldIdLst>
   <p:sldSz cx="12192000" cy="6858000"/>
   <p:notesSz cx="6858000" cy="9144000"/>
@@ -107,6 +107,11 @@
       </a:defRPr>
     </a:lvl9pPr>
   </p:defaultTextStyle>
+  <p:extLst>
+    <p:ext uri="{EFAFB233-063F-42B5-8137-9DF3F51BA10A}">
+      <p15:sldGuideLst xmlns:p15="http://schemas.microsoft.com/office/powerpoint/2012/main"/>
+    </p:ext>
+  </p:extLst>
 </p:presentation>
 </file>
 
@@ -257,7 +262,7 @@
           <a:p>
             <a:fld id="{32F39FBD-4B9B-468B-BBF0-CB7E8A878DF4}" type="datetimeFigureOut">
               <a:rPr kumimoji="1" lang="ja-JP" altLang="en-US" smtClean="0"/>
-              <a:t>2026/9/10</a:t>
+              <a:t>2026/9/15</a:t>
             </a:fld>
             <a:endParaRPr kumimoji="1" lang="ja-JP" altLang="en-US"/>
           </a:p>
@@ -487,7 +492,7 @@
           <a:p>
             <a:fld id="{32F39FBD-4B9B-468B-BBF0-CB7E8A878DF4}" type="datetimeFigureOut">
               <a:rPr kumimoji="1" lang="ja-JP" altLang="en-US" smtClean="0"/>
-              <a:t>2026/9/10</a:t>
+              <a:t>2026/9/15</a:t>
             </a:fld>
             <a:endParaRPr kumimoji="1" lang="ja-JP" altLang="en-US"/>
           </a:p>
@@ -727,7 +732,7 @@
           <a:p>
             <a:fld id="{32F39FBD-4B9B-468B-BBF0-CB7E8A878DF4}" type="datetimeFigureOut">
               <a:rPr kumimoji="1" lang="ja-JP" altLang="en-US" smtClean="0"/>
-              <a:t>2026/9/10</a:t>
+              <a:t>2026/9/15</a:t>
             </a:fld>
             <a:endParaRPr kumimoji="1" lang="ja-JP" altLang="en-US"/>
           </a:p>
@@ -957,7 +962,7 @@
           <a:p>
             <a:fld id="{32F39FBD-4B9B-468B-BBF0-CB7E8A878DF4}" type="datetimeFigureOut">
               <a:rPr kumimoji="1" lang="ja-JP" altLang="en-US" smtClean="0"/>
-              <a:t>2026/9/10</a:t>
+              <a:t>2026/9/15</a:t>
             </a:fld>
             <a:endParaRPr kumimoji="1" lang="ja-JP" altLang="en-US"/>
           </a:p>
@@ -1232,7 +1237,7 @@
           <a:p>
             <a:fld id="{32F39FBD-4B9B-468B-BBF0-CB7E8A878DF4}" type="datetimeFigureOut">
               <a:rPr kumimoji="1" lang="ja-JP" altLang="en-US" smtClean="0"/>
-              <a:t>2026/9/10</a:t>
+              <a:t>2026/9/15</a:t>
             </a:fld>
             <a:endParaRPr kumimoji="1" lang="ja-JP" altLang="en-US"/>
           </a:p>
@@ -1561,7 +1566,7 @@
           <a:p>
             <a:fld id="{32F39FBD-4B9B-468B-BBF0-CB7E8A878DF4}" type="datetimeFigureOut">
               <a:rPr kumimoji="1" lang="ja-JP" altLang="en-US" smtClean="0"/>
-              <a:t>2026/9/10</a:t>
+              <a:t>2026/9/15</a:t>
             </a:fld>
             <a:endParaRPr kumimoji="1" lang="ja-JP" altLang="en-US"/>
           </a:p>
@@ -2037,7 +2042,7 @@
           <a:p>
             <a:fld id="{32F39FBD-4B9B-468B-BBF0-CB7E8A878DF4}" type="datetimeFigureOut">
               <a:rPr kumimoji="1" lang="ja-JP" altLang="en-US" smtClean="0"/>
-              <a:t>2026/9/10</a:t>
+              <a:t>2026/9/15</a:t>
             </a:fld>
             <a:endParaRPr kumimoji="1" lang="ja-JP" altLang="en-US"/>
           </a:p>
@@ -2178,7 +2183,7 @@
           <a:p>
             <a:fld id="{32F39FBD-4B9B-468B-BBF0-CB7E8A878DF4}" type="datetimeFigureOut">
               <a:rPr kumimoji="1" lang="ja-JP" altLang="en-US" smtClean="0"/>
-              <a:t>2026/9/10</a:t>
+              <a:t>2026/9/15</a:t>
             </a:fld>
             <a:endParaRPr kumimoji="1" lang="ja-JP" altLang="en-US"/>
           </a:p>
@@ -2291,7 +2296,7 @@
           <a:p>
             <a:fld id="{32F39FBD-4B9B-468B-BBF0-CB7E8A878DF4}" type="datetimeFigureOut">
               <a:rPr kumimoji="1" lang="ja-JP" altLang="en-US" smtClean="0"/>
-              <a:t>2026/9/10</a:t>
+              <a:t>2026/9/15</a:t>
             </a:fld>
             <a:endParaRPr kumimoji="1" lang="ja-JP" altLang="en-US"/>
           </a:p>
@@ -2634,7 +2639,7 @@
           <a:p>
             <a:fld id="{32F39FBD-4B9B-468B-BBF0-CB7E8A878DF4}" type="datetimeFigureOut">
               <a:rPr kumimoji="1" lang="ja-JP" altLang="en-US" smtClean="0"/>
-              <a:t>2026/9/10</a:t>
+              <a:t>2026/9/15</a:t>
             </a:fld>
             <a:endParaRPr kumimoji="1" lang="ja-JP" altLang="en-US"/>
           </a:p>
@@ -2922,7 +2927,7 @@
           <a:p>
             <a:fld id="{32F39FBD-4B9B-468B-BBF0-CB7E8A878DF4}" type="datetimeFigureOut">
               <a:rPr kumimoji="1" lang="ja-JP" altLang="en-US" smtClean="0"/>
-              <a:t>2026/9/10</a:t>
+              <a:t>2026/9/15</a:t>
             </a:fld>
             <a:endParaRPr kumimoji="1" lang="ja-JP" altLang="en-US"/>
           </a:p>
@@ -3195,7 +3200,7 @@
           <a:p>
             <a:fld id="{32F39FBD-4B9B-468B-BBF0-CB7E8A878DF4}" type="datetimeFigureOut">
               <a:rPr kumimoji="1" lang="ja-JP" altLang="en-US" smtClean="0"/>
-              <a:t>2026/9/10</a:t>
+              <a:t>2026/9/15</a:t>
             </a:fld>
             <a:endParaRPr kumimoji="1" lang="ja-JP" altLang="en-US"/>
           </a:p>
@@ -3626,7 +3631,7 @@
         </p:nvSpPr>
         <p:spPr>
           <a:xfrm>
-            <a:off x="682721" y="2828835"/>
+            <a:off x="855083" y="837950"/>
             <a:ext cx="10826553" cy="1200329"/>
           </a:xfrm>
           <a:prstGeom prst="rect">
@@ -3683,7 +3688,7 @@
         </p:nvSpPr>
         <p:spPr>
           <a:xfrm>
-            <a:off x="4095948" y="4166118"/>
+            <a:off x="7625960" y="3889672"/>
             <a:ext cx="4000097" cy="1938992"/>
           </a:xfrm>
           <a:prstGeom prst="rect">
@@ -3717,7 +3722,15 @@
             </a:r>
             <a:r>
               <a:rPr kumimoji="1" lang="ja-JP" altLang="en-US" sz="2000" dirty="0"/>
-              <a:t>　久保田七翔</a:t>
+              <a:t>　</a:t>
+            </a:r>
+            <a:r>
+              <a:rPr lang="ja-JP" altLang="en-US" sz="2000" dirty="0"/>
+              <a:t> </a:t>
+            </a:r>
+            <a:r>
+              <a:rPr kumimoji="1" lang="ja-JP" altLang="en-US" sz="2000" dirty="0"/>
+              <a:t>久保田七翔</a:t>
             </a:r>
             <a:endParaRPr kumimoji="1" lang="en-US" altLang="ja-JP" sz="2000" dirty="0"/>
           </a:p>
@@ -3728,7 +3741,7 @@
             </a:r>
             <a:r>
               <a:rPr lang="ja-JP" altLang="en-US" sz="2000" dirty="0"/>
-              <a:t>　廣田凌</a:t>
+              <a:t>　 廣田凌</a:t>
             </a:r>
             <a:endParaRPr lang="en-US" altLang="ja-JP" sz="2000" dirty="0"/>
           </a:p>
@@ -3739,7 +3752,7 @@
             </a:r>
             <a:r>
               <a:rPr kumimoji="1" lang="ja-JP" altLang="en-US" sz="2000" dirty="0"/>
-              <a:t>　松本大義</a:t>
+              <a:t>　 松本大義</a:t>
             </a:r>
             <a:endParaRPr kumimoji="1" lang="en-US" altLang="ja-JP" sz="2000" dirty="0"/>
           </a:p>
@@ -3750,12 +3763,42 @@
             </a:r>
             <a:r>
               <a:rPr lang="ja-JP" altLang="en-US" sz="2000" dirty="0"/>
-              <a:t>　玉利倖晟</a:t>
+              <a:t>　 玉利倖晟</a:t>
             </a:r>
             <a:endParaRPr kumimoji="1" lang="en-US" altLang="ja-JP" sz="2000" dirty="0"/>
           </a:p>
         </p:txBody>
       </p:sp>
+      <p:pic>
+        <p:nvPicPr>
+          <p:cNvPr id="2" name="図 1" descr="VRシューティング「SUPERHOT VR」の売上が200万本突破、根強い人気 - MoguLive">
+            <a:extLst>
+              <a:ext uri="{FF2B5EF4-FFF2-40B4-BE49-F238E27FC236}">
+                <a16:creationId xmlns:a16="http://schemas.microsoft.com/office/drawing/2014/main" id="{26682C8B-8002-E81F-8401-965AC32BE4EC}"/>
+              </a:ext>
+            </a:extLst>
+          </p:cNvPr>
+          <p:cNvPicPr>
+            <a:picLocks noChangeAspect="1"/>
+          </p:cNvPicPr>
+          <p:nvPr/>
+        </p:nvPicPr>
+        <p:blipFill>
+          <a:blip r:embed="rId2"/>
+          <a:stretch>
+            <a:fillRect/>
+          </a:stretch>
+        </p:blipFill>
+        <p:spPr>
+          <a:xfrm>
+            <a:off x="1225162" y="2661089"/>
+            <a:ext cx="5926544" cy="3358961"/>
+          </a:xfrm>
+          <a:prstGeom prst="rect">
+            <a:avLst/>
+          </a:prstGeom>
+        </p:spPr>
+      </p:pic>
     </p:spTree>
     <p:extLst>
       <p:ext uri="{BB962C8B-B14F-4D97-AF65-F5344CB8AC3E}">
@@ -3774,7 +3817,13 @@
   <p:cSld>
     <p:spTree>
       <p:nvGrpSpPr>
-        <p:cNvPr id="1" name=""/>
+        <p:cNvPr id="1" name="">
+          <a:extLst>
+            <a:ext uri="{FF2B5EF4-FFF2-40B4-BE49-F238E27FC236}">
+              <a16:creationId xmlns:a16="http://schemas.microsoft.com/office/drawing/2014/main" id="{83D08C76-BE3F-FDEF-82DD-1AAAE9D6542A}"/>
+            </a:ext>
+          </a:extLst>
+        </p:cNvPr>
         <p:cNvGrpSpPr/>
         <p:nvPr/>
       </p:nvGrpSpPr>
@@ -3788,10 +3837,10 @@
       </p:grpSpPr>
       <p:sp>
         <p:nvSpPr>
-          <p:cNvPr id="4" name="テキスト ボックス 3">
-            <a:extLst>
-              <a:ext uri="{FF2B5EF4-FFF2-40B4-BE49-F238E27FC236}">
-                <a16:creationId xmlns:a16="http://schemas.microsoft.com/office/drawing/2014/main" id="{72A4227A-74E4-11B6-CA69-763AA49EFF06}"/>
+          <p:cNvPr id="6" name="テキスト ボックス 5">
+            <a:extLst>
+              <a:ext uri="{FF2B5EF4-FFF2-40B4-BE49-F238E27FC236}">
+                <a16:creationId xmlns:a16="http://schemas.microsoft.com/office/drawing/2014/main" id="{22CEBE50-D7B2-006D-E898-E2E40AB1AE67}"/>
               </a:ext>
             </a:extLst>
           </p:cNvPr>
@@ -3800,42 +3849,7 @@
         </p:nvSpPr>
         <p:spPr>
           <a:xfrm flipH="1">
-            <a:off x="1011935" y="1586764"/>
-            <a:ext cx="2731009" cy="707886"/>
-          </a:xfrm>
-          <a:prstGeom prst="rect">
-            <a:avLst/>
-          </a:prstGeom>
-          <a:noFill/>
-        </p:spPr>
-        <p:txBody>
-          <a:bodyPr wrap="square" rtlCol="0">
-            <a:spAutoFit/>
-          </a:bodyPr>
-          <a:lstStyle/>
-          <a:p>
-            <a:r>
-              <a:rPr kumimoji="1" lang="ja-JP" altLang="en-US" sz="4000" dirty="0"/>
-              <a:t>コンセプト</a:t>
-            </a:r>
-          </a:p>
-        </p:txBody>
-      </p:sp>
-      <p:sp>
-        <p:nvSpPr>
-          <p:cNvPr id="6" name="テキスト ボックス 5">
-            <a:extLst>
-              <a:ext uri="{FF2B5EF4-FFF2-40B4-BE49-F238E27FC236}">
-                <a16:creationId xmlns:a16="http://schemas.microsoft.com/office/drawing/2014/main" id="{BBF2DC62-BFB6-7065-256A-5FC80912C64D}"/>
-              </a:ext>
-            </a:extLst>
-          </p:cNvPr>
-          <p:cNvSpPr txBox="1"/>
-          <p:nvPr/>
-        </p:nvSpPr>
-        <p:spPr>
-          <a:xfrm flipH="1">
-            <a:off x="2377439" y="3244067"/>
+            <a:off x="2129556" y="1256890"/>
             <a:ext cx="7932887" cy="707886"/>
           </a:xfrm>
           <a:prstGeom prst="rect">
@@ -3849,17 +3863,53 @@
           </a:bodyPr>
           <a:lstStyle/>
           <a:p>
-            <a:r>
-              <a:rPr kumimoji="1" lang="ja-JP" altLang="en-US" sz="4000" dirty="0"/>
-              <a:t>戦略がはまった瞬間の気持ちよさ</a:t>
-            </a:r>
-          </a:p>
-        </p:txBody>
-      </p:sp>
+            <a:pPr algn="ctr"/>
+            <a:r>
+              <a:rPr lang="en-US" altLang="ja-JP" sz="4000" b="1" dirty="0"/>
+              <a:t>SUPER HOT</a:t>
+            </a:r>
+            <a:r>
+              <a:rPr lang="ja-JP" altLang="en-US" sz="4000" b="1" dirty="0"/>
+              <a:t>みたいなゲーム</a:t>
+            </a:r>
+            <a:endParaRPr lang="en-US" altLang="ja-JP" sz="4000" b="1" dirty="0"/>
+          </a:p>
+        </p:txBody>
+      </p:sp>
+      <p:pic>
+        <p:nvPicPr>
+          <p:cNvPr id="2" name="図 1" descr="VRゲームのタイムアタックに体力が必要『SUPERHOT VR』8分21秒で全クリ - MoguLive">
+            <a:extLst>
+              <a:ext uri="{FF2B5EF4-FFF2-40B4-BE49-F238E27FC236}">
+                <a16:creationId xmlns:a16="http://schemas.microsoft.com/office/drawing/2014/main" id="{5901A03E-ADEF-55D3-EF97-BACE0E4267FF}"/>
+              </a:ext>
+            </a:extLst>
+          </p:cNvPr>
+          <p:cNvPicPr>
+            <a:picLocks noChangeAspect="1"/>
+          </p:cNvPicPr>
+          <p:nvPr/>
+        </p:nvPicPr>
+        <p:blipFill>
+          <a:blip r:embed="rId2"/>
+          <a:stretch>
+            <a:fillRect/>
+          </a:stretch>
+        </p:blipFill>
+        <p:spPr>
+          <a:xfrm>
+            <a:off x="3207156" y="2560704"/>
+            <a:ext cx="5777688" cy="3248878"/>
+          </a:xfrm>
+          <a:prstGeom prst="rect">
+            <a:avLst/>
+          </a:prstGeom>
+        </p:spPr>
+      </p:pic>
     </p:spTree>
     <p:extLst>
       <p:ext uri="{BB962C8B-B14F-4D97-AF65-F5344CB8AC3E}">
-        <p14:creationId xmlns:p14="http://schemas.microsoft.com/office/powerpoint/2010/main" val="737257992"/>
+        <p14:creationId xmlns:p14="http://schemas.microsoft.com/office/powerpoint/2010/main" val="4237846275"/>
       </p:ext>
     </p:extLst>
   </p:cSld>
@@ -3888,123 +3938,78 @@
       </p:grpSpPr>
       <p:sp>
         <p:nvSpPr>
-          <p:cNvPr id="3" name="コンテンツ プレースホルダー 2">
-            <a:extLst>
-              <a:ext uri="{FF2B5EF4-FFF2-40B4-BE49-F238E27FC236}">
-                <a16:creationId xmlns:a16="http://schemas.microsoft.com/office/drawing/2014/main" id="{1DED9AA4-3C3D-22FD-9E7B-F7CA1D436AA4}"/>
-              </a:ext>
-            </a:extLst>
-          </p:cNvPr>
-          <p:cNvSpPr>
-            <a:spLocks noGrp="1"/>
-          </p:cNvSpPr>
-          <p:nvPr>
-            <p:ph idx="1"/>
-          </p:nvPr>
+          <p:cNvPr id="4" name="テキスト ボックス 3">
+            <a:extLst>
+              <a:ext uri="{FF2B5EF4-FFF2-40B4-BE49-F238E27FC236}">
+                <a16:creationId xmlns:a16="http://schemas.microsoft.com/office/drawing/2014/main" id="{72A4227A-74E4-11B6-CA69-763AA49EFF06}"/>
+              </a:ext>
+            </a:extLst>
+          </p:cNvPr>
+          <p:cNvSpPr txBox="1"/>
+          <p:nvPr/>
         </p:nvSpPr>
         <p:spPr>
-          <a:xfrm>
-            <a:off x="838200" y="1055941"/>
-            <a:ext cx="11353800" cy="6176963"/>
-          </a:xfrm>
-        </p:spPr>
-        <p:txBody>
-          <a:bodyPr/>
-          <a:lstStyle/>
-          <a:p>
-            <a:pPr marL="0" indent="0">
-              <a:buNone/>
-            </a:pPr>
-            <a:r>
-              <a:rPr lang="ja-JP" altLang="en-US" dirty="0"/>
-              <a:t>ゲーム概要</a:t>
-            </a:r>
-            <a:endParaRPr lang="en-US" altLang="ja-JP" dirty="0"/>
-          </a:p>
-          <a:p>
-            <a:pPr marL="0" indent="0">
-              <a:buNone/>
-            </a:pPr>
-            <a:r>
-              <a:rPr lang="ja-JP" altLang="en-US" dirty="0"/>
-              <a:t>・</a:t>
-            </a:r>
-            <a:r>
-              <a:rPr lang="en-US" altLang="ja-JP" dirty="0"/>
-              <a:t>SUPER HOT</a:t>
-            </a:r>
-            <a:r>
-              <a:rPr lang="ja-JP" altLang="en-US" dirty="0"/>
-              <a:t>みたいなゲーム</a:t>
-            </a:r>
-            <a:endParaRPr lang="en-US" altLang="ja-JP" dirty="0"/>
-          </a:p>
-          <a:p>
-            <a:pPr marL="0" indent="0">
-              <a:buNone/>
-            </a:pPr>
-            <a:r>
-              <a:rPr lang="ja-JP" altLang="en-US" dirty="0"/>
-              <a:t>・プレイヤーの動きが止まっているときは時間が止まる！</a:t>
-            </a:r>
-            <a:endParaRPr lang="en-US" altLang="ja-JP" dirty="0"/>
-          </a:p>
-          <a:p>
-            <a:pPr marL="0" indent="0">
-              <a:buNone/>
-            </a:pPr>
-            <a:r>
-              <a:rPr kumimoji="1" lang="ja-JP" altLang="en-US" dirty="0"/>
-              <a:t>・次々と現れる敵を拳や銃で倒す！</a:t>
-            </a:r>
-            <a:endParaRPr kumimoji="1" lang="en-US" altLang="ja-JP" dirty="0"/>
-          </a:p>
-          <a:p>
-            <a:pPr marL="0" indent="0">
-              <a:buNone/>
-            </a:pPr>
-            <a:r>
-              <a:rPr lang="ja-JP" altLang="en-US" dirty="0"/>
-              <a:t>・全ての敵を倒したらステージクリア！</a:t>
-            </a:r>
-            <a:endParaRPr lang="en-US" altLang="ja-JP" dirty="0"/>
-          </a:p>
-        </p:txBody>
-      </p:sp>
-      <p:pic>
-        <p:nvPicPr>
-          <p:cNvPr id="5" name="図 4">
-            <a:extLst>
-              <a:ext uri="{FF2B5EF4-FFF2-40B4-BE49-F238E27FC236}">
-                <a16:creationId xmlns:a16="http://schemas.microsoft.com/office/drawing/2014/main" id="{43372500-D551-F847-84B8-28A129E35CE4}"/>
-              </a:ext>
-            </a:extLst>
-          </p:cNvPr>
-          <p:cNvPicPr>
-            <a:picLocks noChangeAspect="1"/>
-          </p:cNvPicPr>
-          <p:nvPr/>
-        </p:nvPicPr>
-        <p:blipFill>
-          <a:blip r:embed="rId2"/>
-          <a:stretch>
-            <a:fillRect/>
-          </a:stretch>
-        </p:blipFill>
-        <p:spPr>
-          <a:xfrm>
-            <a:off x="6893643" y="3701240"/>
-            <a:ext cx="4922520" cy="2895600"/>
+          <a:xfrm flipH="1">
+            <a:off x="1011935" y="1586764"/>
+            <a:ext cx="2731009" cy="707886"/>
           </a:xfrm>
           <a:prstGeom prst="rect">
             <a:avLst/>
           </a:prstGeom>
+          <a:noFill/>
         </p:spPr>
-      </p:pic>
+        <p:txBody>
+          <a:bodyPr wrap="square" rtlCol="0">
+            <a:spAutoFit/>
+          </a:bodyPr>
+          <a:lstStyle/>
+          <a:p>
+            <a:r>
+              <a:rPr kumimoji="1" lang="ja-JP" altLang="en-US" sz="4000" b="1" dirty="0"/>
+              <a:t>コンセプト</a:t>
+            </a:r>
+          </a:p>
+        </p:txBody>
+      </p:sp>
+      <p:sp>
+        <p:nvSpPr>
+          <p:cNvPr id="6" name="テキスト ボックス 5">
+            <a:extLst>
+              <a:ext uri="{FF2B5EF4-FFF2-40B4-BE49-F238E27FC236}">
+                <a16:creationId xmlns:a16="http://schemas.microsoft.com/office/drawing/2014/main" id="{BBF2DC62-BFB6-7065-256A-5FC80912C64D}"/>
+              </a:ext>
+            </a:extLst>
+          </p:cNvPr>
+          <p:cNvSpPr txBox="1"/>
+          <p:nvPr/>
+        </p:nvSpPr>
+        <p:spPr>
+          <a:xfrm flipH="1">
+            <a:off x="2377439" y="3244067"/>
+            <a:ext cx="7932887" cy="707886"/>
+          </a:xfrm>
+          <a:prstGeom prst="rect">
+            <a:avLst/>
+          </a:prstGeom>
+          <a:noFill/>
+        </p:spPr>
+        <p:txBody>
+          <a:bodyPr wrap="square" rtlCol="0">
+            <a:spAutoFit/>
+          </a:bodyPr>
+          <a:lstStyle/>
+          <a:p>
+            <a:r>
+              <a:rPr kumimoji="1" lang="ja-JP" altLang="en-US" sz="4000" b="1" dirty="0"/>
+              <a:t>戦略がはまった瞬間の気持ちよさ</a:t>
+            </a:r>
+          </a:p>
+        </p:txBody>
+      </p:sp>
     </p:spTree>
     <p:extLst>
       <p:ext uri="{BB962C8B-B14F-4D97-AF65-F5344CB8AC3E}">
-        <p14:creationId xmlns:p14="http://schemas.microsoft.com/office/powerpoint/2010/main" val="1119084455"/>
+        <p14:creationId xmlns:p14="http://schemas.microsoft.com/office/powerpoint/2010/main" val="737257992"/>
       </p:ext>
     </p:extLst>
   </p:cSld>
@@ -4033,10 +4038,135 @@
       </p:grpSpPr>
       <p:sp>
         <p:nvSpPr>
+          <p:cNvPr id="3" name="コンテンツ プレースホルダー 2">
+            <a:extLst>
+              <a:ext uri="{FF2B5EF4-FFF2-40B4-BE49-F238E27FC236}">
+                <a16:creationId xmlns:a16="http://schemas.microsoft.com/office/drawing/2014/main" id="{1DED9AA4-3C3D-22FD-9E7B-F7CA1D436AA4}"/>
+              </a:ext>
+            </a:extLst>
+          </p:cNvPr>
+          <p:cNvSpPr>
+            <a:spLocks noGrp="1"/>
+          </p:cNvSpPr>
+          <p:nvPr>
+            <p:ph idx="1"/>
+          </p:nvPr>
+        </p:nvSpPr>
+        <p:spPr>
+          <a:xfrm>
+            <a:off x="644298" y="1169080"/>
+            <a:ext cx="7245060" cy="3190270"/>
+          </a:xfrm>
+        </p:spPr>
+        <p:txBody>
+          <a:bodyPr/>
+          <a:lstStyle/>
+          <a:p>
+            <a:pPr marL="0" indent="0">
+              <a:buNone/>
+            </a:pPr>
+            <a:r>
+              <a:rPr lang="ja-JP" altLang="en-US"/>
+              <a:t>ゲーム概要</a:t>
+            </a:r>
+            <a:endParaRPr lang="en-US" altLang="ja-JP"/>
+          </a:p>
+          <a:p>
+            <a:pPr marL="0" indent="0">
+              <a:buNone/>
+            </a:pPr>
+            <a:r>
+              <a:rPr lang="ja-JP" altLang="en-US"/>
+              <a:t>・</a:t>
+            </a:r>
+            <a:r>
+              <a:rPr lang="en-US" altLang="ja-JP"/>
+              <a:t>SUPER HOT</a:t>
+            </a:r>
+            <a:r>
+              <a:rPr lang="ja-JP" altLang="en-US"/>
+              <a:t>みたいなゲーム</a:t>
+            </a:r>
+            <a:endParaRPr lang="en-US" altLang="ja-JP"/>
+          </a:p>
+          <a:p>
+            <a:pPr marL="0" indent="0">
+              <a:buNone/>
+            </a:pPr>
+            <a:r>
+              <a:rPr lang="ja-JP" altLang="en-US"/>
+              <a:t>・プレイヤーの動きが止まっているとき</a:t>
+            </a:r>
+            <a:endParaRPr lang="en-US" altLang="ja-JP"/>
+          </a:p>
+          <a:p>
+            <a:pPr marL="0" indent="0">
+              <a:buNone/>
+            </a:pPr>
+            <a:r>
+              <a:rPr lang="ja-JP" altLang="en-US"/>
+              <a:t>は時間が止まる！</a:t>
+            </a:r>
+            <a:endParaRPr lang="en-US" altLang="ja-JP"/>
+          </a:p>
+          <a:p>
+            <a:pPr marL="0" indent="0">
+              <a:buNone/>
+            </a:pPr>
+            <a:r>
+              <a:rPr kumimoji="1" lang="ja-JP" altLang="en-US"/>
+              <a:t>・次々と現れる敵を拳や銃で倒す！</a:t>
+            </a:r>
+            <a:endParaRPr kumimoji="1" lang="en-US" altLang="ja-JP"/>
+          </a:p>
+          <a:p>
+            <a:pPr marL="0" indent="0">
+              <a:buNone/>
+            </a:pPr>
+            <a:r>
+              <a:rPr lang="ja-JP" altLang="en-US"/>
+              <a:t>・全ての敵を倒したらステージクリア！</a:t>
+            </a:r>
+            <a:endParaRPr lang="en-US" altLang="ja-JP" dirty="0"/>
+          </a:p>
+        </p:txBody>
+      </p:sp>
+      <p:pic>
+        <p:nvPicPr>
+          <p:cNvPr id="5" name="図 4">
+            <a:extLst>
+              <a:ext uri="{FF2B5EF4-FFF2-40B4-BE49-F238E27FC236}">
+                <a16:creationId xmlns:a16="http://schemas.microsoft.com/office/drawing/2014/main" id="{43372500-D551-F847-84B8-28A129E35CE4}"/>
+              </a:ext>
+            </a:extLst>
+          </p:cNvPr>
+          <p:cNvPicPr>
+            <a:picLocks noChangeAspect="1"/>
+          </p:cNvPicPr>
+          <p:nvPr/>
+        </p:nvPicPr>
+        <p:blipFill>
+          <a:blip r:embed="rId2"/>
+          <a:stretch>
+            <a:fillRect/>
+          </a:stretch>
+        </p:blipFill>
+        <p:spPr>
+          <a:xfrm>
+            <a:off x="7374206" y="1020223"/>
+            <a:ext cx="4591994" cy="2701173"/>
+          </a:xfrm>
+          <a:prstGeom prst="rect">
+            <a:avLst/>
+          </a:prstGeom>
+        </p:spPr>
+      </p:pic>
+      <p:sp>
+        <p:nvSpPr>
           <p:cNvPr id="4" name="テキスト ボックス 3">
             <a:extLst>
               <a:ext uri="{FF2B5EF4-FFF2-40B4-BE49-F238E27FC236}">
-                <a16:creationId xmlns:a16="http://schemas.microsoft.com/office/drawing/2014/main" id="{8F7A1083-A3A5-671F-4990-AAAB631C73E0}"/>
+                <a16:creationId xmlns:a16="http://schemas.microsoft.com/office/drawing/2014/main" id="{A9F1D0BA-8992-AC50-99CD-A6FEA929F5F9}"/>
               </a:ext>
             </a:extLst>
           </p:cNvPr>
@@ -4045,8 +4175,8 @@
         </p:nvSpPr>
         <p:spPr>
           <a:xfrm>
-            <a:off x="524256" y="2505670"/>
-            <a:ext cx="11667744" cy="1846659"/>
+            <a:off x="644298" y="4827745"/>
+            <a:ext cx="11667744" cy="1231106"/>
           </a:xfrm>
           <a:prstGeom prst="rect">
             <a:avLst/>
@@ -4060,48 +4190,37 @@
           <a:lstStyle/>
           <a:p>
             <a:r>
-              <a:rPr kumimoji="1" lang="ja-JP" altLang="en-US" sz="3200" dirty="0"/>
+              <a:rPr kumimoji="1" lang="ja-JP" altLang="en-US" sz="2800" dirty="0"/>
               <a:t>ターゲットユーザー</a:t>
             </a:r>
-            <a:endParaRPr kumimoji="1" lang="en-US" altLang="ja-JP" sz="3200" dirty="0"/>
-          </a:p>
-          <a:p>
-            <a:endParaRPr kumimoji="1" lang="en-US" altLang="ja-JP" sz="3200" dirty="0"/>
-          </a:p>
-          <a:p>
-            <a:r>
-              <a:rPr lang="en-US" altLang="ja-JP" sz="3200" dirty="0"/>
+            <a:endParaRPr kumimoji="1" lang="en-US" altLang="ja-JP" sz="2800" dirty="0"/>
+          </a:p>
+          <a:p>
+            <a:r>
+              <a:rPr lang="en-US" altLang="ja-JP" sz="2800" dirty="0"/>
               <a:t>SUPER HOT</a:t>
             </a:r>
             <a:r>
-              <a:rPr lang="ja-JP" altLang="en-US" sz="3200" dirty="0"/>
-              <a:t>の売上（</a:t>
-            </a:r>
-            <a:r>
-              <a:rPr lang="en-US" altLang="ja-JP" sz="3200" dirty="0"/>
+              <a:rPr lang="ja-JP" altLang="en-US" sz="2800" dirty="0"/>
+              <a:t>の売上（およそ</a:t>
+            </a:r>
+            <a:r>
+              <a:rPr lang="en-US" altLang="ja-JP" sz="2800" dirty="0"/>
               <a:t>120</a:t>
             </a:r>
             <a:r>
-              <a:rPr lang="ja-JP" altLang="en-US" sz="3200" dirty="0"/>
-              <a:t>～</a:t>
-            </a:r>
-            <a:r>
-              <a:rPr lang="en-US" altLang="ja-JP" sz="3200" dirty="0"/>
-              <a:t>150</a:t>
-            </a:r>
-            <a:r>
-              <a:rPr lang="ja-JP" altLang="en-US" sz="3200" dirty="0"/>
+              <a:rPr lang="ja-JP" altLang="en-US" sz="2800" dirty="0"/>
               <a:t>万本）のだいたい半分　</a:t>
             </a:r>
             <a:r>
-              <a:rPr lang="en-US" altLang="ja-JP" sz="3200" dirty="0"/>
+              <a:rPr lang="en-US" altLang="ja-JP" sz="2800" dirty="0"/>
               <a:t>60</a:t>
             </a:r>
             <a:r>
-              <a:rPr lang="ja-JP" altLang="en-US" sz="3200" dirty="0"/>
+              <a:rPr lang="ja-JP" altLang="en-US" sz="2800" dirty="0"/>
               <a:t>万人</a:t>
             </a:r>
-            <a:endParaRPr lang="en-US" altLang="ja-JP" sz="3200" dirty="0"/>
+            <a:endParaRPr lang="en-US" altLang="ja-JP" sz="2800" dirty="0"/>
           </a:p>
           <a:p>
             <a:endParaRPr kumimoji="1" lang="ja-JP" altLang="en-US" dirty="0"/>
@@ -4111,7 +4230,7 @@
     </p:spTree>
     <p:extLst>
       <p:ext uri="{BB962C8B-B14F-4D97-AF65-F5344CB8AC3E}">
-        <p14:creationId xmlns:p14="http://schemas.microsoft.com/office/powerpoint/2010/main" val="1995955692"/>
+        <p14:creationId xmlns:p14="http://schemas.microsoft.com/office/powerpoint/2010/main" val="1119084455"/>
       </p:ext>
     </p:extLst>
   </p:cSld>
